--- a/OneDrive/Desktop/cloud_reboot_projects/aml-copilot/docs/AML_CoPilot_Demo.pptx
+++ b/OneDrive/Desktop/cloud_reboot_projects/aml-copilot/docs/AML_CoPilot_Demo.pptx
@@ -602,7 +602,7 @@
           <a:p>
             <a:r>
               <a:rPr lang="en-US" dirty="0"/>
-              <a:t>The lesson is a good one to tell: safety checks can fail in the over-cautious direction too, and a verifier that blocks everything is as useless as one that blocks nothing. Token figures: 561,485 input + 128,811 output on the final recording run.</a:t>
+              <a:t>The lesson is a good one to tell: safety checks can fail in the over-cautious direction too, and a verifier that blocks everything is as useless as one that blocks nothing. Token figures: 537,824 input + 132,679 output tokens across the 37 calls in the final recording (prompt version 1.3.0, made after two ground-truth leaks and a totals bug were found and fixed). No retries were needed.</a:t>
             </a:r>
             <a:endParaRPr lang="en-US" dirty="0"/>
           </a:p>
@@ -2627,7 +2627,7 @@
                 <a:ea typeface="Cambria" pitchFamily="34" charset="-122"/>
                 <a:cs typeface="Cambria" pitchFamily="34" charset="-120"/>
               </a:rPr>
-              <a:t>32</a:t>
+              <a:t>37</a:t>
             </a:r>
             <a:endParaRPr lang="en-US" sz="4000" dirty="0"/>
           </a:p>
@@ -2705,7 +2705,7 @@
                 <a:ea typeface="Calibri" pitchFamily="34" charset="-122"/>
                 <a:cs typeface="Calibri" pitchFamily="34" charset="-120"/>
               </a:rPr>
-              <a:t>about 690K tokens for the full recording run</a:t>
+              <a:t>about 670K tokens for the full recording run</a:t>
             </a:r>
             <a:endParaRPr lang="en-US" sz="1350" dirty="0"/>
           </a:p>
@@ -3444,7 +3444,7 @@
                 <a:ea typeface="Calibri" pitchFamily="34" charset="-122"/>
                 <a:cs typeface="Calibri" pitchFamily="34" charset="-120"/>
               </a:rPr>
-              <a:t>Pipeline stepper, key figures, and the AI recommendation — Consider SAR, 60% confidence.</a:t>
+              <a:t>Pipeline stepper, key figures, and the AI recommendation — Consider SAR, 62% (the model's own estimate, not a calculated probability).</a:t>
             </a:r>
             <a:endParaRPr lang="en-US" sz="1350" dirty="0"/>
           </a:p>
@@ -12768,7 +12768,7 @@
                 <a:ea typeface="Calibri" pitchFamily="34" charset="-122"/>
                 <a:cs typeface="Calibri" pitchFamily="34" charset="-120"/>
               </a:rPr>
-              <a:t>customer profiles, alerts and analyst notes. Real KYC data is private by definition, so it's synthesised — and the UI always marks it apart from real-source data.</a:t>
+              <a:t>customer profiles and analyst notes. Real KYC data is private by definition, so it's synthesised, and the UI marks it apart from real-source data. Alerts are raised by fixed rules over the real transactions.</a:t>
             </a:r>
             <a:endParaRPr lang="en-US" sz="1500" dirty="0"/>
           </a:p>
